--- a/presentation.pptx
+++ b/presentation.pptx
@@ -622,11 +622,11 @@
         </c:ser>
         <c:gapWidth val="65"/>
         <c:overlap val="0"/>
-        <c:axId val="7095196"/>
-        <c:axId val="40025728"/>
+        <c:axId val="23999152"/>
+        <c:axId val="21893293"/>
       </c:barChart>
       <c:catAx>
-        <c:axId val="7095196"/>
+        <c:axId val="23999152"/>
         <c:scaling>
           <c:orientation val="minMax"/>
         </c:scaling>
@@ -658,7 +658,7 @@
             </a:pPr>
           </a:p>
         </c:txPr>
-        <c:crossAx val="40025728"/>
+        <c:crossAx val="21893293"/>
         <c:crosses val="autoZero"/>
         <c:auto val="1"/>
         <c:lblAlgn val="ctr"/>
@@ -666,7 +666,7 @@
         <c:noMultiLvlLbl val="0"/>
       </c:catAx>
       <c:valAx>
-        <c:axId val="40025728"/>
+        <c:axId val="21893293"/>
         <c:scaling>
           <c:orientation val="minMax"/>
           <c:max val="5"/>
@@ -709,7 +709,7 @@
             </a:pPr>
           </a:p>
         </c:txPr>
-        <c:crossAx val="7095196"/>
+        <c:crossAx val="23999152"/>
         <c:crosses val="autoZero"/>
         <c:crossBetween val="between"/>
       </c:valAx>
@@ -962,11 +962,11 @@
           </c:yVal>
           <c:smooth val="0"/>
         </c:ser>
-        <c:axId val="90659253"/>
-        <c:axId val="65635871"/>
+        <c:axId val="55247056"/>
+        <c:axId val="90547688"/>
       </c:scatterChart>
       <c:valAx>
-        <c:axId val="90659253"/>
+        <c:axId val="55247056"/>
         <c:scaling>
           <c:orientation val="minMax"/>
           <c:max val="6"/>
@@ -1010,12 +1010,12 @@
             </a:pPr>
           </a:p>
         </c:txPr>
-        <c:crossAx val="65635871"/>
+        <c:crossAx val="90547688"/>
         <c:crosses val="autoZero"/>
         <c:crossBetween val="midCat"/>
       </c:valAx>
       <c:valAx>
-        <c:axId val="65635871"/>
+        <c:axId val="90547688"/>
         <c:scaling>
           <c:orientation val="minMax"/>
           <c:max val="5"/>
@@ -1059,7 +1059,7 @@
             </a:pPr>
           </a:p>
         </c:txPr>
-        <c:crossAx val="90659253"/>
+        <c:crossAx val="55247056"/>
         <c:crosses val="autoZero"/>
         <c:crossBetween val="midCat"/>
       </c:valAx>
@@ -1431,11 +1431,11 @@
         </c:ser>
         <c:gapWidth val="65"/>
         <c:overlap val="0"/>
-        <c:axId val="59544491"/>
-        <c:axId val="74553644"/>
+        <c:axId val="35264586"/>
+        <c:axId val="85298426"/>
       </c:barChart>
       <c:catAx>
-        <c:axId val="59544491"/>
+        <c:axId val="35264586"/>
         <c:scaling>
           <c:orientation val="minMax"/>
         </c:scaling>
@@ -1467,7 +1467,7 @@
             </a:pPr>
           </a:p>
         </c:txPr>
-        <c:crossAx val="74553644"/>
+        <c:crossAx val="85298426"/>
         <c:crosses val="autoZero"/>
         <c:auto val="1"/>
         <c:lblAlgn val="ctr"/>
@@ -1475,7 +1475,7 @@
         <c:noMultiLvlLbl val="0"/>
       </c:catAx>
       <c:valAx>
-        <c:axId val="74553644"/>
+        <c:axId val="85298426"/>
         <c:scaling>
           <c:orientation val="minMax"/>
           <c:max val="5"/>
@@ -1521,7 +1521,7 @@
             </a:pPr>
           </a:p>
         </c:txPr>
-        <c:crossAx val="59544491"/>
+        <c:crossAx val="35264586"/>
         <c:crossBetween val="between"/>
       </c:valAx>
       <c:spPr>
@@ -1642,43 +1642,7 @@
                 </a:solidFill>
                 <a:latin typeface="Arial"/>
               </a:rPr>
-              <a:t>Click </a:t>
-            </a:r>
-            <a:r>
-              <a:rPr b="0" lang="en-US" sz="4400" spc="-1" strike="noStrike">
-                <a:solidFill>
-                  <a:srgbClr val="000000"/>
-                </a:solidFill>
-                <a:latin typeface="Arial"/>
-              </a:rPr>
-              <a:t>to </a:t>
-            </a:r>
-            <a:r>
-              <a:rPr b="0" lang="en-US" sz="4400" spc="-1" strike="noStrike">
-                <a:solidFill>
-                  <a:srgbClr val="000000"/>
-                </a:solidFill>
-                <a:latin typeface="Arial"/>
-              </a:rPr>
-              <a:t>mov</a:t>
-            </a:r>
-            <a:r>
-              <a:rPr b="0" lang="en-US" sz="4400" spc="-1" strike="noStrike">
-                <a:solidFill>
-                  <a:srgbClr val="000000"/>
-                </a:solidFill>
-                <a:latin typeface="Arial"/>
-              </a:rPr>
-              <a:t>e the </a:t>
-            </a:r>
-            <a:r>
-              <a:rPr b="0" lang="en-US" sz="4400" spc="-1" strike="noStrike">
-                <a:solidFill>
-                  <a:srgbClr val="000000"/>
-                </a:solidFill>
-                <a:latin typeface="Arial"/>
-              </a:rPr>
-              <a:t>slide</a:t>
+              <a:t>Click to move the slide</a:t>
             </a:r>
             <a:endParaRPr b="0" lang="en-US" sz="4400" spc="-1" strike="noStrike">
               <a:solidFill>
@@ -1949,7 +1913,7 @@
             <a:pPr indent="0" algn="r">
               <a:buNone/>
             </a:pPr>
-            <a:fld id="{924C486C-B031-4FB7-A253-FC898D52B490}" type="slidenum">
+            <a:fld id="{14382355-8335-43E3-A919-BCD4CCDC7B0D}" type="slidenum">
               <a:rPr b="0" lang="en-US" sz="1400" spc="-1" strike="noStrike">
                 <a:solidFill>
                   <a:srgbClr val="000000"/>
@@ -2108,7 +2072,7 @@
                 <a:tab algn="l" pos="0"/>
               </a:tabLst>
             </a:pPr>
-            <a:fld id="{654DCC08-6D3D-4666-B103-53D4A8E3B78E}" type="slidenum">
+            <a:fld id="{B0F79A6B-7262-4187-BA9F-3881823D49B6}" type="slidenum">
               <a:rPr b="0" lang="en-US" sz="1800" spc="-1" strike="noStrike">
                 <a:solidFill>
                   <a:schemeClr val="dk1"/>
@@ -2267,7 +2231,7 @@
                 <a:tab algn="l" pos="0"/>
               </a:tabLst>
             </a:pPr>
-            <a:fld id="{19B3698A-E6E5-4CC3-8571-21D5CC72ED21}" type="slidenum">
+            <a:fld id="{53B4BD20-D9A5-4CCF-9532-0FEB34E226CD}" type="slidenum">
               <a:rPr b="0" lang="en-US" sz="1800" spc="-1" strike="noStrike">
                 <a:solidFill>
                   <a:schemeClr val="dk1"/>
@@ -2426,7 +2390,7 @@
                 <a:tab algn="l" pos="0"/>
               </a:tabLst>
             </a:pPr>
-            <a:fld id="{0E1A4AED-29DF-4E44-AD2D-DAE915DCE5DF}" type="slidenum">
+            <a:fld id="{00A37B3C-E0EE-4540-80C3-2F0513232966}" type="slidenum">
               <a:rPr b="0" lang="en-US" sz="1800" spc="-1" strike="noStrike">
                 <a:solidFill>
                   <a:schemeClr val="dk1"/>
@@ -2585,7 +2549,7 @@
                 <a:tab algn="l" pos="0"/>
               </a:tabLst>
             </a:pPr>
-            <a:fld id="{6A75E507-5222-4882-974C-96B158CD7D16}" type="slidenum">
+            <a:fld id="{40E3EF3A-054E-4AD9-B1E9-A217E5601A4C}" type="slidenum">
               <a:rPr b="0" lang="en-US" sz="1800" spc="-1" strike="noStrike">
                 <a:solidFill>
                   <a:schemeClr val="dk1"/>
@@ -2744,7 +2708,7 @@
                 <a:tab algn="l" pos="0"/>
               </a:tabLst>
             </a:pPr>
-            <a:fld id="{FC4D6C97-67B3-4F33-B40D-F0454800E5E4}" type="slidenum">
+            <a:fld id="{2FCD0C01-9A10-427F-985B-F5D4D06461BE}" type="slidenum">
               <a:rPr b="0" lang="en-US" sz="1800" spc="-1" strike="noStrike">
                 <a:solidFill>
                   <a:schemeClr val="dk1"/>
@@ -2903,7 +2867,7 @@
                 <a:tab algn="l" pos="0"/>
               </a:tabLst>
             </a:pPr>
-            <a:fld id="{2CEA333C-F0B0-41A1-A001-6E1BDC854D49}" type="slidenum">
+            <a:fld id="{DD94F59E-B640-4DF1-B948-6593CD87B4CC}" type="slidenum">
               <a:rPr b="0" lang="en-US" sz="1800" spc="-1" strike="noStrike">
                 <a:solidFill>
                   <a:schemeClr val="dk1"/>
@@ -3062,7 +3026,7 @@
                 <a:tab algn="l" pos="0"/>
               </a:tabLst>
             </a:pPr>
-            <a:fld id="{39B329F8-1596-4796-A8CF-0DAEE2797C72}" type="slidenum">
+            <a:fld id="{F689191B-D5FE-46A8-B809-7B31954FCB01}" type="slidenum">
               <a:rPr b="0" lang="en-US" sz="1800" spc="-1" strike="noStrike">
                 <a:solidFill>
                   <a:schemeClr val="dk1"/>
@@ -3221,7 +3185,7 @@
                 <a:tab algn="l" pos="0"/>
               </a:tabLst>
             </a:pPr>
-            <a:fld id="{C3F47F25-0745-4AE3-999E-C91CB469B538}" type="slidenum">
+            <a:fld id="{81D763A6-FA28-4EB4-B487-59A017775B94}" type="slidenum">
               <a:rPr b="0" lang="en-US" sz="1800" spc="-1" strike="noStrike">
                 <a:solidFill>
                   <a:schemeClr val="dk1"/>
@@ -3380,7 +3344,7 @@
                 <a:tab algn="l" pos="0"/>
               </a:tabLst>
             </a:pPr>
-            <a:fld id="{86A0F4F8-0B16-4AF2-8889-1A652B68E9B3}" type="slidenum">
+            <a:fld id="{C7D13833-91B7-4159-8DCD-809330C302C3}" type="slidenum">
               <a:rPr b="0" lang="en-US" sz="1800" spc="-1" strike="noStrike">
                 <a:solidFill>
                   <a:schemeClr val="dk1"/>
@@ -3539,7 +3503,7 @@
                 <a:tab algn="l" pos="0"/>
               </a:tabLst>
             </a:pPr>
-            <a:fld id="{0877A934-3123-45C9-80E4-D359BD0B0997}" type="slidenum">
+            <a:fld id="{5B278D60-FAF9-4CFD-A60A-82B18BC8D978}" type="slidenum">
               <a:rPr b="0" lang="en-US" sz="1800" spc="-1" strike="noStrike">
                 <a:solidFill>
                   <a:schemeClr val="dk1"/>
@@ -3698,7 +3662,7 @@
                 <a:tab algn="l" pos="0"/>
               </a:tabLst>
             </a:pPr>
-            <a:fld id="{7259B5CC-5325-41F8-A72A-7D5A3F8A4267}" type="slidenum">
+            <a:fld id="{54B718FD-FD9C-439E-AD4D-12D978080975}" type="slidenum">
               <a:rPr b="0" lang="en-US" sz="1800" spc="-1" strike="noStrike">
                 <a:solidFill>
                   <a:schemeClr val="dk1"/>
@@ -3857,7 +3821,7 @@
                 <a:tab algn="l" pos="0"/>
               </a:tabLst>
             </a:pPr>
-            <a:fld id="{B24FC6ED-4C64-407A-ABBC-8A9DBA78AC7D}" type="slidenum">
+            <a:fld id="{F98344C3-D35B-402E-A07A-1B88AE493411}" type="slidenum">
               <a:rPr b="0" lang="en-US" sz="1800" spc="-1" strike="noStrike">
                 <a:solidFill>
                   <a:schemeClr val="dk1"/>
@@ -3965,16 +3929,7 @@
                 </a:solidFill>
                 <a:latin typeface="Arial"/>
               </a:rPr>
-              <a:t>Click to edit the title text </a:t>
-            </a:r>
-            <a:r>
-              <a:rPr b="0" lang="en-US" sz="4400" spc="-1" strike="noStrike">
-                <a:solidFill>
-                  <a:srgbClr val="000000"/>
-                </a:solidFill>
-                <a:latin typeface="Arial"/>
-              </a:rPr>
-              <a:t>format</a:t>
+              <a:t>Click to edit the title text format</a:t>
             </a:r>
             <a:endParaRPr b="0" lang="en-US" sz="4400" spc="-1" strike="noStrike">
               <a:solidFill>
